--- a/img/figures.pptx
+++ b/img/figures.pptx
@@ -261,7 +261,7 @@
           <a:p>
             <a:fld id="{596F88E7-7AEB-4552-BD1F-3178184D07B5}" type="datetimeFigureOut">
               <a:rPr lang="en-NL" smtClean="0"/>
-              <a:t>27/08/2026</a:t>
+              <a:t>03/09/2026</a:t>
             </a:fld>
             <a:endParaRPr lang="en-NL"/>
           </a:p>
@@ -461,7 +461,7 @@
           <a:p>
             <a:fld id="{596F88E7-7AEB-4552-BD1F-3178184D07B5}" type="datetimeFigureOut">
               <a:rPr lang="en-NL" smtClean="0"/>
-              <a:t>27/08/2026</a:t>
+              <a:t>03/09/2026</a:t>
             </a:fld>
             <a:endParaRPr lang="en-NL"/>
           </a:p>
@@ -671,7 +671,7 @@
           <a:p>
             <a:fld id="{596F88E7-7AEB-4552-BD1F-3178184D07B5}" type="datetimeFigureOut">
               <a:rPr lang="en-NL" smtClean="0"/>
-              <a:t>27/08/2026</a:t>
+              <a:t>03/09/2026</a:t>
             </a:fld>
             <a:endParaRPr lang="en-NL"/>
           </a:p>
@@ -871,7 +871,7 @@
           <a:p>
             <a:fld id="{596F88E7-7AEB-4552-BD1F-3178184D07B5}" type="datetimeFigureOut">
               <a:rPr lang="en-NL" smtClean="0"/>
-              <a:t>27/08/2026</a:t>
+              <a:t>03/09/2026</a:t>
             </a:fld>
             <a:endParaRPr lang="en-NL"/>
           </a:p>
@@ -1147,7 +1147,7 @@
           <a:p>
             <a:fld id="{596F88E7-7AEB-4552-BD1F-3178184D07B5}" type="datetimeFigureOut">
               <a:rPr lang="en-NL" smtClean="0"/>
-              <a:t>27/08/2026</a:t>
+              <a:t>03/09/2026</a:t>
             </a:fld>
             <a:endParaRPr lang="en-NL"/>
           </a:p>
@@ -1415,7 +1415,7 @@
           <a:p>
             <a:fld id="{596F88E7-7AEB-4552-BD1F-3178184D07B5}" type="datetimeFigureOut">
               <a:rPr lang="en-NL" smtClean="0"/>
-              <a:t>27/08/2026</a:t>
+              <a:t>03/09/2026</a:t>
             </a:fld>
             <a:endParaRPr lang="en-NL"/>
           </a:p>
@@ -1830,7 +1830,7 @@
           <a:p>
             <a:fld id="{596F88E7-7AEB-4552-BD1F-3178184D07B5}" type="datetimeFigureOut">
               <a:rPr lang="en-NL" smtClean="0"/>
-              <a:t>27/08/2026</a:t>
+              <a:t>03/09/2026</a:t>
             </a:fld>
             <a:endParaRPr lang="en-NL"/>
           </a:p>
@@ -1972,7 +1972,7 @@
           <a:p>
             <a:fld id="{596F88E7-7AEB-4552-BD1F-3178184D07B5}" type="datetimeFigureOut">
               <a:rPr lang="en-NL" smtClean="0"/>
-              <a:t>27/08/2026</a:t>
+              <a:t>03/09/2026</a:t>
             </a:fld>
             <a:endParaRPr lang="en-NL"/>
           </a:p>
@@ -2085,7 +2085,7 @@
           <a:p>
             <a:fld id="{596F88E7-7AEB-4552-BD1F-3178184D07B5}" type="datetimeFigureOut">
               <a:rPr lang="en-NL" smtClean="0"/>
-              <a:t>27/08/2026</a:t>
+              <a:t>03/09/2026</a:t>
             </a:fld>
             <a:endParaRPr lang="en-NL"/>
           </a:p>
@@ -2398,7 +2398,7 @@
           <a:p>
             <a:fld id="{596F88E7-7AEB-4552-BD1F-3178184D07B5}" type="datetimeFigureOut">
               <a:rPr lang="en-NL" smtClean="0"/>
-              <a:t>27/08/2026</a:t>
+              <a:t>03/09/2026</a:t>
             </a:fld>
             <a:endParaRPr lang="en-NL"/>
           </a:p>
@@ -2687,7 +2687,7 @@
           <a:p>
             <a:fld id="{596F88E7-7AEB-4552-BD1F-3178184D07B5}" type="datetimeFigureOut">
               <a:rPr lang="en-NL" smtClean="0"/>
-              <a:t>27/08/2026</a:t>
+              <a:t>03/09/2026</a:t>
             </a:fld>
             <a:endParaRPr lang="en-NL"/>
           </a:p>
@@ -2930,7 +2930,7 @@
           <a:p>
             <a:fld id="{596F88E7-7AEB-4552-BD1F-3178184D07B5}" type="datetimeFigureOut">
               <a:rPr lang="en-NL" smtClean="0"/>
-              <a:t>27/08/2026</a:t>
+              <a:t>03/09/2026</a:t>
             </a:fld>
             <a:endParaRPr lang="en-NL"/>
           </a:p>
@@ -3657,8 +3657,8 @@
         </p:nvSpPr>
         <p:spPr>
           <a:xfrm>
-            <a:off x="8910158" y="2896915"/>
-            <a:ext cx="2509519" cy="646331"/>
+            <a:off x="8910159" y="2896915"/>
+            <a:ext cx="1920402" cy="646331"/>
           </a:xfrm>
           <a:prstGeom prst="rect">
             <a:avLst/>
@@ -3678,7 +3678,7 @@
             </a:pPr>
             <a:r>
               <a:rPr lang="hu-HU" dirty="0"/>
-              <a:t>Map phosphosite-kinase relationships</a:t>
+              <a:t>Prediction of kinases</a:t>
             </a:r>
             <a:endParaRPr lang="en-NL" dirty="0"/>
           </a:p>
@@ -3872,6 +3872,53 @@
               <a:t>A minimum signal significance is required for reliable kinase detection</a:t>
             </a:r>
             <a:endParaRPr lang="en-NL" dirty="0"/>
+          </a:p>
+        </p:txBody>
+      </p:sp>
+      <p:sp>
+        <p:nvSpPr>
+          <p:cNvPr id="2" name="Rectangle 1">
+            <a:extLst>
+              <a:ext uri="{FF2B5EF4-FFF2-40B4-BE49-F238E27FC236}">
+                <a16:creationId xmlns:a16="http://schemas.microsoft.com/office/drawing/2014/main" id="{AF741E85-443E-CF3D-84C6-2B624E575185}"/>
+              </a:ext>
+            </a:extLst>
+          </p:cNvPr>
+          <p:cNvSpPr/>
+          <p:nvPr/>
+        </p:nvSpPr>
+        <p:spPr>
+          <a:xfrm>
+            <a:off x="782320" y="162560"/>
+            <a:ext cx="9946640" cy="4521200"/>
+          </a:xfrm>
+          <a:prstGeom prst="rect">
+            <a:avLst/>
+          </a:prstGeom>
+          <a:noFill/>
+        </p:spPr>
+        <p:style>
+          <a:lnRef idx="2">
+            <a:schemeClr val="accent1">
+              <a:shade val="15000"/>
+            </a:schemeClr>
+          </a:lnRef>
+          <a:fillRef idx="1">
+            <a:schemeClr val="accent1"/>
+          </a:fillRef>
+          <a:effectRef idx="0">
+            <a:schemeClr val="accent1"/>
+          </a:effectRef>
+          <a:fontRef idx="minor">
+            <a:schemeClr val="lt1"/>
+          </a:fontRef>
+        </p:style>
+        <p:txBody>
+          <a:bodyPr rtlCol="0" anchor="ctr"/>
+          <a:lstStyle/>
+          <a:p>
+            <a:pPr algn="ctr"/>
+            <a:endParaRPr lang="en-NL"/>
           </a:p>
         </p:txBody>
       </p:sp>
